--- a/projects/selfintroduction/selfintroduction_pptx.pptx
+++ b/projects/selfintroduction/selfintroduction_pptx.pptx
@@ -8,6 +8,9 @@
     <p:sldId id="256" r:id="rId2"/>
     <p:sldId id="257" r:id="rId3"/>
     <p:sldId id="258" r:id="rId4"/>
+    <p:sldId id="259" r:id="rId5"/>
+    <p:sldId id="260" r:id="rId6"/>
+    <p:sldId id="261" r:id="rId7"/>
   </p:sldIdLst>
   <p:sldSz cx="9144000" cy="5143500" type="screen16x9"/>
   <p:notesSz cx="6858000" cy="9144000"/>
@@ -3164,7 +3167,7 @@
             </a:pPr>
             <a:r>
               <a:rPr/>
-              <a:t>自己紹介</a:t>
+              <a:t>ごあいさつ</a:t>
             </a:r>
           </a:p>
         </p:txBody>
@@ -3176,7 +3179,7 @@
             <a:spLocks noGrp="1"/>
           </p:cNvSpPr>
           <p:nvPr>
-            <p:ph idx="1"/>
+            <p:ph idx="1" sz="half"/>
           </p:nvPr>
         </p:nvSpPr>
         <p:spPr/>
@@ -3187,25 +3190,55 @@
             <a:pPr lvl="0"/>
             <a:r>
               <a:rPr/>
-              <a:t>名前：唐川</a:t>
+              <a:t>本日より入社しました、唐川です</a:t>
             </a:r>
           </a:p>
           <a:p>
             <a:pPr lvl="0"/>
             <a:r>
               <a:rPr/>
-              <a:t>出身地：福岡</a:t>
+              <a:t>まだまだ慣れないことも多いですが、少しずつ頑張っていきます</a:t>
             </a:r>
           </a:p>
           <a:p>
             <a:pPr lvl="0"/>
             <a:r>
               <a:rPr/>
-              <a:t>趣味：ゲーム制作</a:t>
-            </a:r>
-          </a:p>
-        </p:txBody>
-      </p:sp>
+              <a:t>これからよろしくお願いいたします！</a:t>
+            </a:r>
+          </a:p>
+        </p:txBody>
+      </p:sp>
+      <p:pic>
+        <p:nvPicPr>
+          <p:cNvPr descr="img/profile.png" id="0" name="Picture 1"/>
+          <p:cNvPicPr>
+            <a:picLocks noGrp="1" noChangeAspect="1"/>
+          </p:cNvPicPr>
+          <p:nvPr/>
+        </p:nvPicPr>
+        <p:blipFill>
+          <a:blip r:embed="rId2"/>
+          <a:stretch>
+            <a:fillRect/>
+          </a:stretch>
+        </p:blipFill>
+        <p:spPr bwMode="auto">
+          <a:xfrm>
+            <a:off x="5524500" y="1193800"/>
+            <a:ext cx="2286000" cy="3390900"/>
+          </a:xfrm>
+          <a:prstGeom prst="rect">
+            <a:avLst/>
+          </a:prstGeom>
+          <a:noFill/>
+          <a:ln w="9525">
+            <a:noFill/>
+            <a:headEnd/>
+            <a:tailEnd/>
+          </a:ln>
+        </p:spPr>
+      </p:pic>
     </p:spTree>
   </p:cSld>
 </p:sld>
@@ -3248,7 +3281,7 @@
             </a:pPr>
             <a:r>
               <a:rPr/>
-              <a:t>2枚目</a:t>
+              <a:t>ちょっとだけ自己紹介</a:t>
             </a:r>
           </a:p>
         </p:txBody>
@@ -3271,7 +3304,273 @@
             <a:pPr lvl="0"/>
             <a:r>
               <a:rPr/>
-              <a:t>2枚目の内容</a:t>
+              <a:t>福岡出身です</a:t>
+            </a:r>
+          </a:p>
+          <a:p>
+            <a:pPr lvl="0"/>
+            <a:r>
+              <a:rPr/>
+              <a:t>情報系の大学院にいました</a:t>
+            </a:r>
+          </a:p>
+          <a:p>
+            <a:pPr lvl="0"/>
+            <a:r>
+              <a:rPr/>
+              <a:t>ゲーム制作とか、ものづくりが好きです</a:t>
+            </a:r>
+          </a:p>
+        </p:txBody>
+      </p:sp>
+    </p:spTree>
+  </p:cSld>
+</p:sld>
+</file>
+
+<file path=ppt/slides/slide4.xml><?xml version="1.0" encoding="utf-8"?>
+<p:sld xmlns:a="http://schemas.openxmlformats.org/drawingml/2006/main" xmlns:r="http://schemas.openxmlformats.org/officeDocument/2006/relationships" xmlns:p="http://schemas.openxmlformats.org/presentationml/2006/main">
+  <p:cSld>
+    <p:spTree>
+      <p:nvGrpSpPr>
+        <p:cNvPr id="1" name=""/>
+        <p:cNvGrpSpPr/>
+        <p:nvPr/>
+      </p:nvGrpSpPr>
+      <p:grpSpPr>
+        <a:xfrm>
+          <a:off x="0" y="0"/>
+          <a:ext cx="0" cy="0"/>
+          <a:chOff x="0" y="0"/>
+          <a:chExt cx="0" cy="0"/>
+        </a:xfrm>
+      </p:grpSpPr>
+      <p:sp>
+        <p:nvSpPr>
+          <p:cNvPr id="2" name="Title 1"/>
+          <p:cNvSpPr>
+            <a:spLocks noGrp="1"/>
+          </p:cNvSpPr>
+          <p:nvPr>
+            <p:ph type="title"/>
+          </p:nvPr>
+        </p:nvSpPr>
+        <p:spPr/>
+        <p:txBody>
+          <a:bodyPr/>
+          <a:lstStyle/>
+          <a:p>
+            <a:pPr lvl="0" indent="0" marL="0">
+              <a:buNone/>
+            </a:pPr>
+            <a:r>
+              <a:rPr/>
+              <a:t>好きなこと</a:t>
+            </a:r>
+          </a:p>
+        </p:txBody>
+      </p:sp>
+      <p:sp>
+        <p:nvSpPr>
+          <p:cNvPr id="3" name="Content Placeholder 2"/>
+          <p:cNvSpPr>
+            <a:spLocks noGrp="1"/>
+          </p:cNvSpPr>
+          <p:nvPr>
+            <p:ph idx="1"/>
+          </p:nvPr>
+        </p:nvSpPr>
+        <p:spPr/>
+        <p:txBody>
+          <a:bodyPr/>
+          <a:lstStyle/>
+          <a:p>
+            <a:pPr lvl="0"/>
+            <a:r>
+              <a:rPr/>
+              <a:t>ゲーム制作（Unity）</a:t>
+            </a:r>
+          </a:p>
+          <a:p>
+            <a:pPr lvl="0"/>
+            <a:r>
+              <a:rPr/>
+              <a:t>新しいことを試すこと</a:t>
+            </a:r>
+          </a:p>
+          <a:p>
+            <a:pPr lvl="0"/>
+            <a:r>
+              <a:rPr/>
+              <a:t>「どうしたら使いやすいか」を考えるのが好きです</a:t>
+            </a:r>
+          </a:p>
+        </p:txBody>
+      </p:sp>
+    </p:spTree>
+  </p:cSld>
+</p:sld>
+</file>
+
+<file path=ppt/slides/slide5.xml><?xml version="1.0" encoding="utf-8"?>
+<p:sld xmlns:a="http://schemas.openxmlformats.org/drawingml/2006/main" xmlns:r="http://schemas.openxmlformats.org/officeDocument/2006/relationships" xmlns:p="http://schemas.openxmlformats.org/presentationml/2006/main">
+  <p:cSld>
+    <p:spTree>
+      <p:nvGrpSpPr>
+        <p:cNvPr id="1" name=""/>
+        <p:cNvGrpSpPr/>
+        <p:nvPr/>
+      </p:nvGrpSpPr>
+      <p:grpSpPr>
+        <a:xfrm>
+          <a:off x="0" y="0"/>
+          <a:ext cx="0" cy="0"/>
+          <a:chOff x="0" y="0"/>
+          <a:chExt cx="0" cy="0"/>
+        </a:xfrm>
+      </p:grpSpPr>
+      <p:sp>
+        <p:nvSpPr>
+          <p:cNvPr id="2" name="Title 1"/>
+          <p:cNvSpPr>
+            <a:spLocks noGrp="1"/>
+          </p:cNvSpPr>
+          <p:nvPr>
+            <p:ph type="title"/>
+          </p:nvPr>
+        </p:nvSpPr>
+        <p:spPr/>
+        <p:txBody>
+          <a:bodyPr/>
+          <a:lstStyle/>
+          <a:p>
+            <a:pPr lvl="0" indent="0" marL="0">
+              <a:buNone/>
+            </a:pPr>
+            <a:r>
+              <a:rPr/>
+              <a:t>これから</a:t>
+            </a:r>
+          </a:p>
+        </p:txBody>
+      </p:sp>
+      <p:sp>
+        <p:nvSpPr>
+          <p:cNvPr id="3" name="Content Placeholder 2"/>
+          <p:cNvSpPr>
+            <a:spLocks noGrp="1"/>
+          </p:cNvSpPr>
+          <p:nvPr>
+            <p:ph idx="1"/>
+          </p:nvPr>
+        </p:nvSpPr>
+        <p:spPr/>
+        <p:txBody>
+          <a:bodyPr/>
+          <a:lstStyle/>
+          <a:p>
+            <a:pPr lvl="0"/>
+            <a:r>
+              <a:rPr/>
+              <a:t>まずは仕事に慣れることを大事にしたいです</a:t>
+            </a:r>
+          </a:p>
+          <a:p>
+            <a:pPr lvl="0"/>
+            <a:r>
+              <a:rPr/>
+              <a:t>少しずつできることを増やしていきたいです</a:t>
+            </a:r>
+          </a:p>
+          <a:p>
+            <a:pPr lvl="0"/>
+            <a:r>
+              <a:rPr/>
+              <a:t>将来的には「使う人にやさしいもの」を作れるようになりたいです</a:t>
+            </a:r>
+          </a:p>
+        </p:txBody>
+      </p:sp>
+    </p:spTree>
+  </p:cSld>
+</p:sld>
+</file>
+
+<file path=ppt/slides/slide6.xml><?xml version="1.0" encoding="utf-8"?>
+<p:sld xmlns:a="http://schemas.openxmlformats.org/drawingml/2006/main" xmlns:r="http://schemas.openxmlformats.org/officeDocument/2006/relationships" xmlns:p="http://schemas.openxmlformats.org/presentationml/2006/main">
+  <p:cSld>
+    <p:spTree>
+      <p:nvGrpSpPr>
+        <p:cNvPr id="1" name=""/>
+        <p:cNvGrpSpPr/>
+        <p:nvPr/>
+      </p:nvGrpSpPr>
+      <p:grpSpPr>
+        <a:xfrm>
+          <a:off x="0" y="0"/>
+          <a:ext cx="0" cy="0"/>
+          <a:chOff x="0" y="0"/>
+          <a:chExt cx="0" cy="0"/>
+        </a:xfrm>
+      </p:grpSpPr>
+      <p:sp>
+        <p:nvSpPr>
+          <p:cNvPr id="2" name="Title 1"/>
+          <p:cNvSpPr>
+            <a:spLocks noGrp="1"/>
+          </p:cNvSpPr>
+          <p:nvPr>
+            <p:ph type="title"/>
+          </p:nvPr>
+        </p:nvSpPr>
+        <p:spPr/>
+        <p:txBody>
+          <a:bodyPr/>
+          <a:lstStyle/>
+          <a:p>
+            <a:pPr lvl="0" indent="0" marL="0">
+              <a:buNone/>
+            </a:pPr>
+            <a:r>
+              <a:rPr/>
+              <a:t>最後に</a:t>
+            </a:r>
+          </a:p>
+        </p:txBody>
+      </p:sp>
+      <p:sp>
+        <p:nvSpPr>
+          <p:cNvPr id="3" name="Content Placeholder 2"/>
+          <p:cNvSpPr>
+            <a:spLocks noGrp="1"/>
+          </p:cNvSpPr>
+          <p:nvPr>
+            <p:ph idx="1"/>
+          </p:nvPr>
+        </p:nvSpPr>
+        <p:spPr/>
+        <p:txBody>
+          <a:bodyPr/>
+          <a:lstStyle/>
+          <a:p>
+            <a:pPr lvl="0"/>
+            <a:r>
+              <a:rPr/>
+              <a:t>分からないことも多いので、いろいろ教えていただけると嬉しいです</a:t>
+            </a:r>
+          </a:p>
+          <a:p>
+            <a:pPr lvl="0"/>
+            <a:r>
+              <a:rPr/>
+              <a:t>一日でも早く役に立てるよう頑張ります</a:t>
+            </a:r>
+          </a:p>
+          <a:p>
+            <a:pPr lvl="0"/>
+            <a:r>
+              <a:rPr/>
+              <a:t>よろしくお願いします！</a:t>
             </a:r>
           </a:p>
         </p:txBody>

--- a/projects/selfintroduction/selfintroduction_pptx.pptx
+++ b/projects/selfintroduction/selfintroduction_pptx.pptx
@@ -3120,7 +3120,7 @@
             </a:pPr>
             <a:r>
               <a:rPr/>
-              <a:t>自己紹介</a:t>
+              <a:t>自己紹介だよ</a:t>
             </a:r>
           </a:p>
         </p:txBody>

--- a/projects/selfintroduction/selfintroduction_pptx.pptx
+++ b/projects/selfintroduction/selfintroduction_pptx.pptx
@@ -5746,7 +5746,7 @@
             </a:pPr>
             <a:r>
               <a:rPr/>
-              <a:t>ごあいさつ</a:t>
+              <a:t>ごあいさつaa</a:t>
             </a:r>
           </a:p>
         </p:txBody>
@@ -5789,7 +5789,7 @@
             </a:pPr>
             <a:r>
               <a:rPr/>
-              <a:t>これからよろしくお願いいたします！</a:t>
+              <a:t>これからよろしくお願いいたします</a:t>
             </a:r>
           </a:p>
         </p:txBody>
